--- a/docs/Proyecto2_Presentacion.pptx
+++ b/docs/Proyecto2_Presentacion.pptx
@@ -3176,6 +3176,18 @@
             </a:pPr>
             <a:r>
               <a:t>Integrantes: ______________________</a:t>
+            </a:r>
+          </a:p>
+          <a:p>
+            <a:pPr>
+              <a:defRPr sz="1200">
+                <a:solidFill>
+                  <a:srgbClr val="0F6E63"/>
+                </a:solidFill>
+              </a:defRPr>
+            </a:pPr>
+            <a:r>
+              <a:t>https://github.com/Javiervalladares1/CC3084-Proyecto2-Drought-EDA</a:t>
             </a:r>
           </a:p>
         </p:txBody>
